--- a/Trouver une formation en ligne/Trouver_sa_Formation_2026.pptx
+++ b/Trouver une formation en ligne/Trouver_sa_Formation_2026.pptx
@@ -1541,7 +1541,7 @@
           <p:nvPr/>
         </p:nvPicPr>
         <p:blipFill>
-          <a:blip r:embed="rId6"/>
+          <a:blip r:embed="rId4"/>
           <a:stretch>
             <a:fillRect/>
           </a:stretch>
@@ -1637,7 +1637,7 @@
           <p:nvPr/>
         </p:nvPicPr>
         <p:blipFill>
-          <a:blip r:embed="rId4"/>
+          <a:blip r:embed="rId5"/>
           <a:stretch>
             <a:fillRect/>
           </a:stretch>
@@ -2303,7 +2303,7 @@
           <p:nvPr/>
         </p:nvPicPr>
         <p:blipFill>
-          <a:blip r:embed="rId5"/>
+          <a:blip r:embed="rId6"/>
           <a:stretch>
             <a:fillRect/>
           </a:stretch>
@@ -2388,6 +2388,46 @@
                 <a:cs typeface="Calibri" pitchFamily="34" charset="-120"/>
               </a:rPr>
               <a:t>Cédric WALTENER  ·  Médiateur Numérique  ·  Guéret 2026</a:t>
+            </a:r>
+          </a:p>
+        </p:txBody>
+      </p:sp>
+      <p:sp>
+        <p:nvSpPr>
+          <p:cNvPr id="21" name="ZoneTexte 20">
+            <a:extLst>
+              <a:ext uri="{FF2B5EF4-FFF2-40B4-BE49-F238E27FC236}">
+                <a16:creationId xmlns:a16="http://schemas.microsoft.com/office/drawing/2014/main" id="{6282352D-2E81-11A4-0236-F9A64C3D94B0}"/>
+              </a:ext>
+            </a:extLst>
+          </p:cNvPr>
+          <p:cNvSpPr txBox="1"/>
+          <p:nvPr/>
+        </p:nvSpPr>
+        <p:spPr>
+          <a:xfrm>
+            <a:off x="0" y="6578600"/>
+            <a:ext cx="12192000" cy="230832"/>
+          </a:xfrm>
+          <a:prstGeom prst="rect">
+            <a:avLst/>
+          </a:prstGeom>
+          <a:noFill/>
+        </p:spPr>
+        <p:txBody>
+          <a:bodyPr vert="horz" rtlCol="0">
+            <a:spAutoFit/>
+          </a:bodyPr>
+          <a:lstStyle/>
+          <a:p>
+            <a:pPr algn="ctr"/>
+            <a:r>
+              <a:rPr lang="fr-FR" sz="900">
+                <a:solidFill>
+                  <a:srgbClr val="B4B4B4"/>
+                </a:solidFill>
+              </a:rPr>
+              <a:t>(c) titi_23 - mediateur-numerique.github.io - Reproduction interdite sans autorisation</a:t>
             </a:r>
           </a:p>
         </p:txBody>
@@ -3407,6 +3447,46 @@
               <a:t>10</a:t>
             </a:r>
             <a:endParaRPr lang="en-US" sz="1300" dirty="0"/>
+          </a:p>
+        </p:txBody>
+      </p:sp>
+      <p:sp>
+        <p:nvSpPr>
+          <p:cNvPr id="31" name="ZoneTexte 30">
+            <a:extLst>
+              <a:ext uri="{FF2B5EF4-FFF2-40B4-BE49-F238E27FC236}">
+                <a16:creationId xmlns:a16="http://schemas.microsoft.com/office/drawing/2014/main" id="{DDB52B8B-FD07-5356-6565-7ABBED8D9F22}"/>
+              </a:ext>
+            </a:extLst>
+          </p:cNvPr>
+          <p:cNvSpPr txBox="1"/>
+          <p:nvPr/>
+        </p:nvSpPr>
+        <p:spPr>
+          <a:xfrm>
+            <a:off x="0" y="6578600"/>
+            <a:ext cx="12192000" cy="230832"/>
+          </a:xfrm>
+          <a:prstGeom prst="rect">
+            <a:avLst/>
+          </a:prstGeom>
+          <a:noFill/>
+        </p:spPr>
+        <p:txBody>
+          <a:bodyPr vert="horz" rtlCol="0">
+            <a:spAutoFit/>
+          </a:bodyPr>
+          <a:lstStyle/>
+          <a:p>
+            <a:pPr algn="ctr"/>
+            <a:r>
+              <a:rPr lang="fr-FR" sz="900">
+                <a:solidFill>
+                  <a:srgbClr val="B4B4B4"/>
+                </a:solidFill>
+              </a:rPr>
+              <a:t>(c) titi_23 - mediateur-numerique.github.io - Reproduction interdite sans autorisation</a:t>
+            </a:r>
           </a:p>
         </p:txBody>
       </p:sp>
@@ -4269,6 +4349,46 @@
           </a:p>
         </p:txBody>
       </p:sp>
+      <p:sp>
+        <p:nvSpPr>
+          <p:cNvPr id="23" name="ZoneTexte 22">
+            <a:extLst>
+              <a:ext uri="{FF2B5EF4-FFF2-40B4-BE49-F238E27FC236}">
+                <a16:creationId xmlns:a16="http://schemas.microsoft.com/office/drawing/2014/main" id="{564EBD92-B737-D0A7-56DB-3CD3E5E164B0}"/>
+              </a:ext>
+            </a:extLst>
+          </p:cNvPr>
+          <p:cNvSpPr txBox="1"/>
+          <p:nvPr/>
+        </p:nvSpPr>
+        <p:spPr>
+          <a:xfrm>
+            <a:off x="0" y="6578600"/>
+            <a:ext cx="12192000" cy="230832"/>
+          </a:xfrm>
+          <a:prstGeom prst="rect">
+            <a:avLst/>
+          </a:prstGeom>
+          <a:noFill/>
+        </p:spPr>
+        <p:txBody>
+          <a:bodyPr vert="horz" rtlCol="0">
+            <a:spAutoFit/>
+          </a:bodyPr>
+          <a:lstStyle/>
+          <a:p>
+            <a:pPr algn="ctr"/>
+            <a:r>
+              <a:rPr lang="fr-FR" sz="900">
+                <a:solidFill>
+                  <a:srgbClr val="B4B4B4"/>
+                </a:solidFill>
+              </a:rPr>
+              <a:t>(c) titi_23 - mediateur-numerique.github.io - Reproduction interdite sans autorisation</a:t>
+            </a:r>
+          </a:p>
+        </p:txBody>
+      </p:sp>
     </p:spTree>
   </p:cSld>
   <p:clrMapOvr>
@@ -5345,6 +5465,46 @@
           </a:p>
         </p:txBody>
       </p:sp>
+      <p:sp>
+        <p:nvSpPr>
+          <p:cNvPr id="31" name="ZoneTexte 30">
+            <a:extLst>
+              <a:ext uri="{FF2B5EF4-FFF2-40B4-BE49-F238E27FC236}">
+                <a16:creationId xmlns:a16="http://schemas.microsoft.com/office/drawing/2014/main" id="{1873CF58-24D5-5BEA-9F97-19464BEAB9D8}"/>
+              </a:ext>
+            </a:extLst>
+          </p:cNvPr>
+          <p:cNvSpPr txBox="1"/>
+          <p:nvPr/>
+        </p:nvSpPr>
+        <p:spPr>
+          <a:xfrm>
+            <a:off x="0" y="6578600"/>
+            <a:ext cx="12192000" cy="230832"/>
+          </a:xfrm>
+          <a:prstGeom prst="rect">
+            <a:avLst/>
+          </a:prstGeom>
+          <a:noFill/>
+        </p:spPr>
+        <p:txBody>
+          <a:bodyPr vert="horz" rtlCol="0">
+            <a:spAutoFit/>
+          </a:bodyPr>
+          <a:lstStyle/>
+          <a:p>
+            <a:pPr algn="ctr"/>
+            <a:r>
+              <a:rPr lang="fr-FR" sz="900">
+                <a:solidFill>
+                  <a:srgbClr val="B4B4B4"/>
+                </a:solidFill>
+              </a:rPr>
+              <a:t>(c) titi_23 - mediateur-numerique.github.io - Reproduction interdite sans autorisation</a:t>
+            </a:r>
+          </a:p>
+        </p:txBody>
+      </p:sp>
     </p:spTree>
   </p:cSld>
   <p:clrMapOvr>
@@ -5500,7 +5660,7 @@
                 <a:ea typeface="Calibri" pitchFamily="34" charset="-122"/>
                 <a:cs typeface="Calibri" pitchFamily="34" charset="-120"/>
               </a:rPr>
-              <a:t xml:space="preserve"> = </a:t>
+              <a:t> = </a:t>
             </a:r>
             <a:r>
               <a:rPr lang="en-US" sz="1450" b="1" dirty="0">
@@ -6189,7 +6349,7 @@
                 <a:ea typeface="Calibri" pitchFamily="34" charset="-122"/>
                 <a:cs typeface="Calibri" pitchFamily="34" charset="-120"/>
               </a:rPr>
-              <a:t xml:space="preserve"> : salarié, demandeur d'emploi, indépendant, fonctionnaire.  </a:t>
+              <a:t> : salarié, demandeur d'emploi, indépendant, fonctionnaire.  </a:t>
             </a:r>
             <a:r>
               <a:rPr lang="en-US" sz="1350" b="1" dirty="0">
@@ -6211,7 +6371,7 @@
                 <a:ea typeface="Calibri" pitchFamily="34" charset="-122"/>
                 <a:cs typeface="Calibri" pitchFamily="34" charset="-120"/>
               </a:rPr>
-              <a:t xml:space="preserve"> Le compte n'est plus alimenté, mais </a:t>
+              <a:t> Le compte n'est plus alimenté, mais </a:t>
             </a:r>
             <a:r>
               <a:rPr lang="en-US" sz="1350" b="1" dirty="0">
@@ -6233,7 +6393,7 @@
                 <a:ea typeface="Calibri" pitchFamily="34" charset="-122"/>
                 <a:cs typeface="Calibri" pitchFamily="34" charset="-120"/>
               </a:rPr>
-              <a:t xml:space="preserve"> et utilisables.</a:t>
+              <a:t> et utilisables.</a:t>
             </a:r>
             <a:endParaRPr lang="en-US" sz="1350" dirty="0"/>
           </a:p>
@@ -6314,6 +6474,46 @@
               <a:t>03</a:t>
             </a:r>
             <a:endParaRPr lang="en-US" sz="1300" dirty="0"/>
+          </a:p>
+        </p:txBody>
+      </p:sp>
+      <p:sp>
+        <p:nvSpPr>
+          <p:cNvPr id="24" name="ZoneTexte 23">
+            <a:extLst>
+              <a:ext uri="{FF2B5EF4-FFF2-40B4-BE49-F238E27FC236}">
+                <a16:creationId xmlns:a16="http://schemas.microsoft.com/office/drawing/2014/main" id="{92F0D386-37CD-4219-BCDE-1D5166D43AE1}"/>
+              </a:ext>
+            </a:extLst>
+          </p:cNvPr>
+          <p:cNvSpPr txBox="1"/>
+          <p:nvPr/>
+        </p:nvSpPr>
+        <p:spPr>
+          <a:xfrm>
+            <a:off x="0" y="6578600"/>
+            <a:ext cx="12192000" cy="230832"/>
+          </a:xfrm>
+          <a:prstGeom prst="rect">
+            <a:avLst/>
+          </a:prstGeom>
+          <a:noFill/>
+        </p:spPr>
+        <p:txBody>
+          <a:bodyPr vert="horz" rtlCol="0">
+            <a:spAutoFit/>
+          </a:bodyPr>
+          <a:lstStyle/>
+          <a:p>
+            <a:pPr algn="ctr"/>
+            <a:r>
+              <a:rPr lang="fr-FR" sz="900">
+                <a:solidFill>
+                  <a:srgbClr val="B4B4B4"/>
+                </a:solidFill>
+              </a:rPr>
+              <a:t>(c) titi_23 - mediateur-numerique.github.io - Reproduction interdite sans autorisation</a:t>
+            </a:r>
           </a:p>
         </p:txBody>
       </p:sp>
@@ -7416,7 +7616,7 @@
                 <a:ea typeface="Calibri" pitchFamily="34" charset="-122"/>
                 <a:cs typeface="Calibri" pitchFamily="34" charset="-120"/>
               </a:rPr>
-              <a:t xml:space="preserve">Pas de smartphone ou pas à l'aise ?  </a:t>
+              <a:t>Pas de smartphone ou pas à l'aise ?  </a:t>
             </a:r>
             <a:r>
               <a:rPr lang="en-US" sz="1300" dirty="0">
@@ -7508,6 +7708,46 @@
               <a:t>04</a:t>
             </a:r>
             <a:endParaRPr lang="en-US" sz="1300" dirty="0"/>
+          </a:p>
+        </p:txBody>
+      </p:sp>
+      <p:sp>
+        <p:nvSpPr>
+          <p:cNvPr id="34" name="ZoneTexte 33">
+            <a:extLst>
+              <a:ext uri="{FF2B5EF4-FFF2-40B4-BE49-F238E27FC236}">
+                <a16:creationId xmlns:a16="http://schemas.microsoft.com/office/drawing/2014/main" id="{273DE08C-0594-B3D0-D5E8-930467B30974}"/>
+              </a:ext>
+            </a:extLst>
+          </p:cNvPr>
+          <p:cNvSpPr txBox="1"/>
+          <p:nvPr/>
+        </p:nvSpPr>
+        <p:spPr>
+          <a:xfrm>
+            <a:off x="0" y="6578600"/>
+            <a:ext cx="12192000" cy="230832"/>
+          </a:xfrm>
+          <a:prstGeom prst="rect">
+            <a:avLst/>
+          </a:prstGeom>
+          <a:noFill/>
+        </p:spPr>
+        <p:txBody>
+          <a:bodyPr vert="horz" rtlCol="0">
+            <a:spAutoFit/>
+          </a:bodyPr>
+          <a:lstStyle/>
+          <a:p>
+            <a:pPr algn="ctr"/>
+            <a:r>
+              <a:rPr lang="fr-FR" sz="900">
+                <a:solidFill>
+                  <a:srgbClr val="B4B4B4"/>
+                </a:solidFill>
+              </a:rPr>
+              <a:t>(c) titi_23 - mediateur-numerique.github.io - Reproduction interdite sans autorisation</a:t>
+            </a:r>
           </a:p>
         </p:txBody>
       </p:sp>
@@ -8174,7 +8414,7 @@
                 <a:ea typeface="Calibri" pitchFamily="34" charset="-122"/>
                 <a:cs typeface="Calibri" pitchFamily="34" charset="-120"/>
               </a:rPr>
-              <a:t xml:space="preserve">Permis B (jusqu'à 900 €), mais aussi poids lourds et transport, sans plafond pour les </a:t>
+              <a:t>Permis B (jusqu'à 900 €), mais aussi poids lourds et transport, sans plafond pour les </a:t>
             </a:r>
             <a:r>
               <a:rPr lang="en-US" sz="1080" dirty="0" err="1">
@@ -8196,7 +8436,7 @@
                 <a:ea typeface="Calibri" pitchFamily="34" charset="-122"/>
                 <a:cs typeface="Calibri" pitchFamily="34" charset="-120"/>
               </a:rPr>
-              <a:t xml:space="preserve"> </a:t>
+              <a:t> </a:t>
             </a:r>
             <a:r>
               <a:rPr lang="en-US" sz="1080" dirty="0" err="1">
@@ -8776,7 +9016,7 @@
                 <a:ea typeface="Calibri" pitchFamily="34" charset="-122"/>
                 <a:cs typeface="Calibri" pitchFamily="34" charset="-120"/>
               </a:rPr>
-              <a:t xml:space="preserve">À l'inverse, </a:t>
+              <a:t>À l'inverse, </a:t>
             </a:r>
             <a:r>
               <a:rPr lang="en-US" sz="1250" b="1" dirty="0">
@@ -8798,7 +9038,7 @@
                 <a:ea typeface="Calibri" pitchFamily="34" charset="-122"/>
                 <a:cs typeface="Calibri" pitchFamily="34" charset="-120"/>
               </a:rPr>
-              <a:t xml:space="preserve"> le matériel, les loisirs, ni les formations non certifiantes.</a:t>
+              <a:t> le matériel, les loisirs, ni les formations non certifiantes.</a:t>
             </a:r>
             <a:endParaRPr lang="en-US" sz="1250" dirty="0"/>
           </a:p>
@@ -8879,6 +9119,46 @@
               <a:t>05</a:t>
             </a:r>
             <a:endParaRPr lang="en-US" sz="1300" dirty="0"/>
+          </a:p>
+        </p:txBody>
+      </p:sp>
+      <p:sp>
+        <p:nvSpPr>
+          <p:cNvPr id="38" name="ZoneTexte 37">
+            <a:extLst>
+              <a:ext uri="{FF2B5EF4-FFF2-40B4-BE49-F238E27FC236}">
+                <a16:creationId xmlns:a16="http://schemas.microsoft.com/office/drawing/2014/main" id="{05F81A42-5B50-DD20-51EF-1B8B60043C0D}"/>
+              </a:ext>
+            </a:extLst>
+          </p:cNvPr>
+          <p:cNvSpPr txBox="1"/>
+          <p:nvPr/>
+        </p:nvSpPr>
+        <p:spPr>
+          <a:xfrm>
+            <a:off x="0" y="6578600"/>
+            <a:ext cx="12192000" cy="230832"/>
+          </a:xfrm>
+          <a:prstGeom prst="rect">
+            <a:avLst/>
+          </a:prstGeom>
+          <a:noFill/>
+        </p:spPr>
+        <p:txBody>
+          <a:bodyPr vert="horz" rtlCol="0">
+            <a:spAutoFit/>
+          </a:bodyPr>
+          <a:lstStyle/>
+          <a:p>
+            <a:pPr algn="ctr"/>
+            <a:r>
+              <a:rPr lang="fr-FR" sz="900">
+                <a:solidFill>
+                  <a:srgbClr val="B4B4B4"/>
+                </a:solidFill>
+              </a:rPr>
+              <a:t>(c) titi_23 - mediateur-numerique.github.io - Reproduction interdite sans autorisation</a:t>
+            </a:r>
           </a:p>
         </p:txBody>
       </p:sp>
@@ -9187,7 +9467,7 @@
                 <a:ea typeface="Bookman Old Style" pitchFamily="34" charset="-122"/>
                 <a:cs typeface="Bookman Old Style" pitchFamily="34" charset="-120"/>
               </a:rPr>
-              <a:t xml:space="preserve">Mais beaucoup en sont </a:t>
+              <a:t>Mais beaucoup en sont </a:t>
             </a:r>
             <a:r>
               <a:rPr lang="en-US" sz="1800" b="1" dirty="0">
@@ -9209,7 +9489,7 @@
                 <a:ea typeface="Bookman Old Style" pitchFamily="34" charset="-122"/>
                 <a:cs typeface="Bookman Old Style" pitchFamily="34" charset="-120"/>
               </a:rPr>
-              <a:t xml:space="preserve"> :</a:t>
+              <a:t> :</a:t>
             </a:r>
             <a:endParaRPr lang="en-US" sz="1800" dirty="0"/>
           </a:p>
@@ -9864,7 +10144,7 @@
                 <a:ea typeface="Calibri" pitchFamily="34" charset="-122"/>
                 <a:cs typeface="Calibri" pitchFamily="34" charset="-120"/>
               </a:rPr>
-              <a:t xml:space="preserve">Beaucoup de vos apprenants sont demandeurs d'emploi : </a:t>
+              <a:t>Beaucoup de vos apprenants sont demandeurs d'emploi : </a:t>
             </a:r>
             <a:r>
               <a:rPr lang="en-US" sz="1250" b="1" dirty="0">
@@ -9956,6 +10236,46 @@
               <a:t>06</a:t>
             </a:r>
             <a:endParaRPr lang="en-US" sz="1300" dirty="0"/>
+          </a:p>
+        </p:txBody>
+      </p:sp>
+      <p:sp>
+        <p:nvSpPr>
+          <p:cNvPr id="31" name="ZoneTexte 30">
+            <a:extLst>
+              <a:ext uri="{FF2B5EF4-FFF2-40B4-BE49-F238E27FC236}">
+                <a16:creationId xmlns:a16="http://schemas.microsoft.com/office/drawing/2014/main" id="{C1DA568C-2655-11B6-48E4-59E9F19BDA9E}"/>
+              </a:ext>
+            </a:extLst>
+          </p:cNvPr>
+          <p:cNvSpPr txBox="1"/>
+          <p:nvPr/>
+        </p:nvSpPr>
+        <p:spPr>
+          <a:xfrm>
+            <a:off x="0" y="6578600"/>
+            <a:ext cx="12192000" cy="230832"/>
+          </a:xfrm>
+          <a:prstGeom prst="rect">
+            <a:avLst/>
+          </a:prstGeom>
+          <a:noFill/>
+        </p:spPr>
+        <p:txBody>
+          <a:bodyPr vert="horz" rtlCol="0">
+            <a:spAutoFit/>
+          </a:bodyPr>
+          <a:lstStyle/>
+          <a:p>
+            <a:pPr algn="ctr"/>
+            <a:r>
+              <a:rPr lang="fr-FR" sz="900">
+                <a:solidFill>
+                  <a:srgbClr val="B4B4B4"/>
+                </a:solidFill>
+              </a:rPr>
+              <a:t>(c) titi_23 - mediateur-numerique.github.io - Reproduction interdite sans autorisation</a:t>
+            </a:r>
           </a:p>
         </p:txBody>
       </p:sp>
@@ -11377,7 +11697,7 @@
                 <a:ea typeface="Calibri" pitchFamily="34" charset="-122"/>
                 <a:cs typeface="Calibri" pitchFamily="34" charset="-120"/>
               </a:rPr>
-              <a:t xml:space="preserve">Le bon réflexe : le conseiller CEP (gratuit).  </a:t>
+              <a:t>Le bon réflexe : le conseiller CEP (gratuit).  </a:t>
             </a:r>
             <a:r>
               <a:rPr lang="en-US" sz="1200" dirty="0">
@@ -11469,6 +11789,46 @@
               <a:t>07</a:t>
             </a:r>
             <a:endParaRPr lang="en-US" sz="1300" dirty="0"/>
+          </a:p>
+        </p:txBody>
+      </p:sp>
+      <p:sp>
+        <p:nvSpPr>
+          <p:cNvPr id="41" name="ZoneTexte 40">
+            <a:extLst>
+              <a:ext uri="{FF2B5EF4-FFF2-40B4-BE49-F238E27FC236}">
+                <a16:creationId xmlns:a16="http://schemas.microsoft.com/office/drawing/2014/main" id="{87AF99F7-44B5-ADCD-C5FD-F9D8112A9550}"/>
+              </a:ext>
+            </a:extLst>
+          </p:cNvPr>
+          <p:cNvSpPr txBox="1"/>
+          <p:nvPr/>
+        </p:nvSpPr>
+        <p:spPr>
+          <a:xfrm>
+            <a:off x="0" y="6578600"/>
+            <a:ext cx="12192000" cy="230832"/>
+          </a:xfrm>
+          <a:prstGeom prst="rect">
+            <a:avLst/>
+          </a:prstGeom>
+          <a:noFill/>
+        </p:spPr>
+        <p:txBody>
+          <a:bodyPr vert="horz" rtlCol="0">
+            <a:spAutoFit/>
+          </a:bodyPr>
+          <a:lstStyle/>
+          <a:p>
+            <a:pPr algn="ctr"/>
+            <a:r>
+              <a:rPr lang="fr-FR" sz="900">
+                <a:solidFill>
+                  <a:srgbClr val="B4B4B4"/>
+                </a:solidFill>
+              </a:rPr>
+              <a:t>(c) titi_23 - mediateur-numerique.github.io - Reproduction interdite sans autorisation</a:t>
+            </a:r>
           </a:p>
         </p:txBody>
       </p:sp>
@@ -11627,7 +11987,7 @@
                 <a:ea typeface="Calibri" pitchFamily="34" charset="-122"/>
                 <a:cs typeface="Calibri" pitchFamily="34" charset="-120"/>
               </a:rPr>
-              <a:t xml:space="preserve"> pour aller directement sur chaque site officiel.</a:t>
+              <a:t> pour aller directement sur chaque site officiel.</a:t>
             </a:r>
             <a:endParaRPr lang="en-US" sz="1300" dirty="0"/>
           </a:p>
@@ -13094,6 +13454,46 @@
               <a:t>08</a:t>
             </a:r>
             <a:endParaRPr lang="en-US" sz="1300" dirty="0"/>
+          </a:p>
+        </p:txBody>
+      </p:sp>
+      <p:sp>
+        <p:nvSpPr>
+          <p:cNvPr id="49" name="ZoneTexte 48">
+            <a:extLst>
+              <a:ext uri="{FF2B5EF4-FFF2-40B4-BE49-F238E27FC236}">
+                <a16:creationId xmlns:a16="http://schemas.microsoft.com/office/drawing/2014/main" id="{6A00C479-53CE-938F-9F45-73ACCF039699}"/>
+              </a:ext>
+            </a:extLst>
+          </p:cNvPr>
+          <p:cNvSpPr txBox="1"/>
+          <p:nvPr/>
+        </p:nvSpPr>
+        <p:spPr>
+          <a:xfrm>
+            <a:off x="0" y="6578600"/>
+            <a:ext cx="12192000" cy="230832"/>
+          </a:xfrm>
+          <a:prstGeom prst="rect">
+            <a:avLst/>
+          </a:prstGeom>
+          <a:noFill/>
+        </p:spPr>
+        <p:txBody>
+          <a:bodyPr vert="horz" rtlCol="0">
+            <a:spAutoFit/>
+          </a:bodyPr>
+          <a:lstStyle/>
+          <a:p>
+            <a:pPr algn="ctr"/>
+            <a:r>
+              <a:rPr lang="fr-FR" sz="900">
+                <a:solidFill>
+                  <a:srgbClr val="B4B4B4"/>
+                </a:solidFill>
+              </a:rPr>
+              <a:t>(c) titi_23 - mediateur-numerique.github.io - Reproduction interdite sans autorisation</a:t>
+            </a:r>
           </a:p>
         </p:txBody>
       </p:sp>
@@ -14391,6 +14791,46 @@
               <a:t>09</a:t>
             </a:r>
             <a:endParaRPr lang="en-US" sz="1300" dirty="0"/>
+          </a:p>
+        </p:txBody>
+      </p:sp>
+      <p:sp>
+        <p:nvSpPr>
+          <p:cNvPr id="38" name="ZoneTexte 37">
+            <a:extLst>
+              <a:ext uri="{FF2B5EF4-FFF2-40B4-BE49-F238E27FC236}">
+                <a16:creationId xmlns:a16="http://schemas.microsoft.com/office/drawing/2014/main" id="{83D98B18-929D-D0A0-2124-1335DC4C7D2F}"/>
+              </a:ext>
+            </a:extLst>
+          </p:cNvPr>
+          <p:cNvSpPr txBox="1"/>
+          <p:nvPr/>
+        </p:nvSpPr>
+        <p:spPr>
+          <a:xfrm>
+            <a:off x="0" y="6578600"/>
+            <a:ext cx="12192000" cy="230832"/>
+          </a:xfrm>
+          <a:prstGeom prst="rect">
+            <a:avLst/>
+          </a:prstGeom>
+          <a:noFill/>
+        </p:spPr>
+        <p:txBody>
+          <a:bodyPr vert="horz" rtlCol="0">
+            <a:spAutoFit/>
+          </a:bodyPr>
+          <a:lstStyle/>
+          <a:p>
+            <a:pPr algn="ctr"/>
+            <a:r>
+              <a:rPr lang="fr-FR" sz="900">
+                <a:solidFill>
+                  <a:srgbClr val="B4B4B4"/>
+                </a:solidFill>
+              </a:rPr>
+              <a:t>(c) titi_23 - mediateur-numerique.github.io - Reproduction interdite sans autorisation</a:t>
+            </a:r>
           </a:p>
         </p:txBody>
       </p:sp>
